--- a/02/ppt/02-3_웹과_프로그래밍_언어의_역사_v1.pptx
+++ b/02/ppt/02-3_웹과_프로그래밍_언어의_역사_v1.pptx
@@ -3182,7 +3182,7 @@
                 <a:ea typeface="IBM Plex Sans KR"/>
                 <a:cs typeface="IBM Plex Sans KR"/>
               </a:rPr>
-              <a:t>교과서 02-3</a:t>
+              <a:t>교과서 02-3 · 8쪽</a:t>
             </a:r>
           </a:p>
         </p:txBody>
@@ -4584,7 +4584,7 @@
                 <a:ea typeface="IBM Plex Sans KR"/>
                 <a:cs typeface="IBM Plex Sans KR"/>
               </a:rPr>
-              <a:t>교과서 02-3</a:t>
+              <a:t>교과서 02-3 · 8쪽</a:t>
             </a:r>
           </a:p>
         </p:txBody>
@@ -6258,7 +6258,7 @@
                 <a:ea typeface="IBM Plex Sans KR"/>
                 <a:cs typeface="IBM Plex Sans KR"/>
               </a:rPr>
-              <a:t>교과서 02-3</a:t>
+              <a:t>교과서 02-3 · 9쪽</a:t>
             </a:r>
           </a:p>
         </p:txBody>
@@ -7445,7 +7445,7 @@
                 <a:ea typeface="IBM Plex Sans KR"/>
                 <a:cs typeface="IBM Plex Sans KR"/>
               </a:rPr>
-              <a:t>교과서 02-3</a:t>
+              <a:t>교과서 02-3 · 9쪽</a:t>
             </a:r>
           </a:p>
         </p:txBody>
@@ -8359,7 +8359,7 @@
                 <a:ea typeface="IBM Plex Sans KR"/>
                 <a:cs typeface="IBM Plex Sans KR"/>
               </a:rPr>
-              <a:t>교과서 02-3</a:t>
+              <a:t>교과서 02-3 · 10쪽</a:t>
             </a:r>
           </a:p>
         </p:txBody>
@@ -9629,7 +9629,7 @@
                 <a:ea typeface="IBM Plex Sans KR"/>
                 <a:cs typeface="IBM Plex Sans KR"/>
               </a:rPr>
-              <a:t>교과서 02-3</a:t>
+              <a:t>교과서 02-3 · 11쪽</a:t>
             </a:r>
           </a:p>
         </p:txBody>
@@ -10628,7 +10628,7 @@
                 <a:ea typeface="IBM Plex Sans KR"/>
                 <a:cs typeface="IBM Plex Sans KR"/>
               </a:rPr>
-              <a:t>교과서 02-3</a:t>
+              <a:t>교과서 02-3 · 2쪽</a:t>
             </a:r>
           </a:p>
         </p:txBody>
@@ -11180,7 +11180,7 @@
                 <a:ea typeface="IBM Plex Sans KR"/>
                 <a:cs typeface="IBM Plex Sans KR"/>
               </a:rPr>
-              <a:t>교과서 02-3</a:t>
+              <a:t>교과서 02-3 · 2쪽</a:t>
             </a:r>
           </a:p>
         </p:txBody>
@@ -12248,7 +12248,7 @@
                 <a:ea typeface="IBM Plex Sans KR"/>
                 <a:cs typeface="IBM Plex Sans KR"/>
               </a:rPr>
-              <a:t>교과서 02-3</a:t>
+              <a:t>교과서 02-3 · 3쪽</a:t>
             </a:r>
           </a:p>
         </p:txBody>
@@ -14152,7 +14152,7 @@
                 <a:ea typeface="IBM Plex Sans KR"/>
                 <a:cs typeface="IBM Plex Sans KR"/>
               </a:rPr>
-              <a:t>교과서 02-3</a:t>
+              <a:t>교과서 02-3 · 3쪽</a:t>
             </a:r>
           </a:p>
         </p:txBody>
@@ -17059,7 +17059,7 @@
                 <a:ea typeface="IBM Plex Sans KR"/>
                 <a:cs typeface="IBM Plex Sans KR"/>
               </a:rPr>
-              <a:t>교과서 02-3</a:t>
+              <a:t>교과서 02-3 · 5쪽</a:t>
             </a:r>
           </a:p>
         </p:txBody>
@@ -18214,7 +18214,7 @@
                 <a:ea typeface="IBM Plex Sans KR"/>
                 <a:cs typeface="IBM Plex Sans KR"/>
               </a:rPr>
-              <a:t>교과서 02-3</a:t>
+              <a:t>교과서 02-3 · 6쪽</a:t>
             </a:r>
           </a:p>
         </p:txBody>
@@ -19686,7 +19686,7 @@
                 <a:ea typeface="IBM Plex Sans KR"/>
                 <a:cs typeface="IBM Plex Sans KR"/>
               </a:rPr>
-              <a:t>교과서 02-3</a:t>
+              <a:t>교과서 02-3 · 7쪽</a:t>
             </a:r>
           </a:p>
         </p:txBody>

--- a/02/ppt/02-3_웹과_프로그래밍_언어의_역사_v1.pptx
+++ b/02/ppt/02-3_웹과_프로그래밍_언어의_역사_v1.pptx
@@ -3182,7 +3182,7 @@
                 <a:ea typeface="IBM Plex Sans KR"/>
                 <a:cs typeface="IBM Plex Sans KR"/>
               </a:rPr>
-              <a:t>교과서 02-3 · 8쪽</a:t>
+              <a:t>교과서 02-3 · 9쪽</a:t>
             </a:r>
           </a:p>
         </p:txBody>
@@ -4584,7 +4584,7 @@
                 <a:ea typeface="IBM Plex Sans KR"/>
                 <a:cs typeface="IBM Plex Sans KR"/>
               </a:rPr>
-              <a:t>교과서 02-3 · 8쪽</a:t>
+              <a:t>교과서 02-3 · 9쪽</a:t>
             </a:r>
           </a:p>
         </p:txBody>
@@ -6258,7 +6258,7 @@
                 <a:ea typeface="IBM Plex Sans KR"/>
                 <a:cs typeface="IBM Plex Sans KR"/>
               </a:rPr>
-              <a:t>교과서 02-3 · 9쪽</a:t>
+              <a:t>교과서 02-3 · 10쪽</a:t>
             </a:r>
           </a:p>
         </p:txBody>
@@ -7445,7 +7445,7 @@
                 <a:ea typeface="IBM Plex Sans KR"/>
                 <a:cs typeface="IBM Plex Sans KR"/>
               </a:rPr>
-              <a:t>교과서 02-3 · 9쪽</a:t>
+              <a:t>교과서 02-3 · 10쪽</a:t>
             </a:r>
           </a:p>
         </p:txBody>
@@ -8359,7 +8359,7 @@
                 <a:ea typeface="IBM Plex Sans KR"/>
                 <a:cs typeface="IBM Plex Sans KR"/>
               </a:rPr>
-              <a:t>교과서 02-3 · 10쪽</a:t>
+              <a:t>교과서 02-3 · 11쪽</a:t>
             </a:r>
           </a:p>
         </p:txBody>
@@ -9629,7 +9629,7 @@
                 <a:ea typeface="IBM Plex Sans KR"/>
                 <a:cs typeface="IBM Plex Sans KR"/>
               </a:rPr>
-              <a:t>교과서 02-3 · 11쪽</a:t>
+              <a:t>교과서 02-3 · 12쪽</a:t>
             </a:r>
           </a:p>
         </p:txBody>
@@ -17059,7 +17059,7 @@
                 <a:ea typeface="IBM Plex Sans KR"/>
                 <a:cs typeface="IBM Plex Sans KR"/>
               </a:rPr>
-              <a:t>교과서 02-3 · 5쪽</a:t>
+              <a:t>교과서 02-3 · 5–6쪽</a:t>
             </a:r>
           </a:p>
         </p:txBody>
@@ -18214,7 +18214,7 @@
                 <a:ea typeface="IBM Plex Sans KR"/>
                 <a:cs typeface="IBM Plex Sans KR"/>
               </a:rPr>
-              <a:t>교과서 02-3 · 6쪽</a:t>
+              <a:t>교과서 02-3 · 7쪽</a:t>
             </a:r>
           </a:p>
         </p:txBody>
@@ -19686,7 +19686,7 @@
                 <a:ea typeface="IBM Plex Sans KR"/>
                 <a:cs typeface="IBM Plex Sans KR"/>
               </a:rPr>
-              <a:t>교과서 02-3 · 7쪽</a:t>
+              <a:t>교과서 02-3 · 8쪽</a:t>
             </a:r>
           </a:p>
         </p:txBody>
